--- a/sayt/media/resources/2026/10/mehnat-muhofazasi-08-mavzu.pptx
+++ b/sayt/media/resources/2026/10/mehnat-muhofazasi-08-mavzu.pptx
@@ -10506,556 +10506,6 @@
         <p:spPr>
           <a:xfrm>
             <a:off x="6530187" y="1809750"/>
-            <a:ext cx="4936991" cy="337819"/>
-          </a:xfrm>
-          <a:prstGeom prst="rect">
-            <a:avLst/>
-          </a:prstGeom>
-          <a:noFill/>
-        </p:spPr>
-        <p:txBody>
-          <a:bodyPr wrap="square" lIns="0" rIns="0" tIns="0" bIns="0" anchor="t">
-            <a:spAutoFit/>
-          </a:bodyPr>
-          <a:lstStyle/>
-          <a:p>
-            <a:pPr algn="l">
-              <a:lnSpc>
-                <a:spcPts val="2300"/>
-              </a:lnSpc>
-            </a:pPr>
-            <a:r>
-              <a:rPr sz="2000" b="1">
-                <a:solidFill>
-                  <a:srgbClr val="1B2A4A"/>
-                </a:solidFill>
-                <a:latin typeface="Georgia"/>
-              </a:rPr>
-              <a:t>Hushini tekshirish.</a:t>
-            </a:r>
-          </a:p>
-        </p:txBody>
-      </p:sp>
-      <p:sp>
-        <p:nvSpPr>
-          <p:cNvPr id="44" name="TextBox 43"/>
-          <p:cNvSpPr txBox="1"/>
-          <p:nvPr/>
-        </p:nvSpPr>
-        <p:spPr>
-          <a:xfrm>
-            <a:off x="6530187" y="2193290"/>
-            <a:ext cx="4936991" cy="607060"/>
-          </a:xfrm>
-          <a:prstGeom prst="rect">
-            <a:avLst/>
-          </a:prstGeom>
-          <a:noFill/>
-        </p:spPr>
-        <p:txBody>
-          <a:bodyPr wrap="square" lIns="0" rIns="0" tIns="0" bIns="0" anchor="t">
-            <a:spAutoFit/>
-          </a:bodyPr>
-          <a:lstStyle/>
-          <a:p>
-            <a:pPr algn="l">
-              <a:lnSpc>
-                <a:spcPts val="2210"/>
-              </a:lnSpc>
-            </a:pPr>
-            <a:r>
-              <a:rPr sz="1700" b="0">
-                <a:solidFill>
-                  <a:srgbClr val="3A4560"/>
-                </a:solidFill>
-                <a:latin typeface="Segoe UI"/>
-              </a:rPr>
-              <a:t>Jabrlanuvchining yelkasiga yengil tegib, baland</a:t>
-            </a:r>
-            <a:br/>
-            <a:r>
-              <a:rPr sz="1700" b="0">
-                <a:solidFill>
-                  <a:srgbClr val="3A4560"/>
-                </a:solidFill>
-                <a:latin typeface="Segoe UI"/>
-              </a:rPr>
-              <a:t>ovozda murojaat qiling: «Sizga nima bo‘ldi?</a:t>
-            </a:r>
-          </a:p>
-        </p:txBody>
-      </p:sp>
-      <p:sp>
-        <p:nvSpPr>
-          <p:cNvPr id="45" name="Rounded Rectangle 44"/>
-          <p:cNvSpPr/>
-          <p:nvPr/>
-        </p:nvSpPr>
-        <p:spPr>
-          <a:xfrm>
-            <a:off x="731520" y="3184652"/>
-            <a:ext cx="5204307" cy="1310894"/>
-          </a:xfrm>
-          <a:prstGeom prst="roundRect">
-            <a:avLst>
-              <a:gd name="adj" fmla="val 5580"/>
-            </a:avLst>
-          </a:prstGeom>
-          <a:solidFill>
-            <a:srgbClr val="FBF6EC"/>
-          </a:solidFill>
-          <a:ln w="12700">
-            <a:solidFill>
-              <a:srgbClr val="D8C8AE"/>
-            </a:solidFill>
-          </a:ln>
-          <a:effectLst/>
-        </p:spPr>
-        <p:style>
-          <a:lnRef idx="1">
-            <a:schemeClr val="accent1"/>
-          </a:lnRef>
-          <a:fillRef idx="3">
-            <a:schemeClr val="accent1"/>
-          </a:fillRef>
-          <a:effectRef idx="2">
-            <a:schemeClr val="accent1"/>
-          </a:effectRef>
-          <a:fontRef idx="minor">
-            <a:schemeClr val="lt1"/>
-          </a:fontRef>
-        </p:style>
-        <p:txBody>
-          <a:bodyPr rtlCol="0" anchor="ctr"/>
-          <a:lstStyle/>
-          <a:p>
-            <a:pPr algn="ctr"/>
-          </a:p>
-        </p:txBody>
-      </p:sp>
-      <p:sp>
-        <p:nvSpPr>
-          <p:cNvPr id="46" name="Rectangle 45"/>
-          <p:cNvSpPr/>
-          <p:nvPr/>
-        </p:nvSpPr>
-        <p:spPr>
-          <a:xfrm>
-            <a:off x="731520" y="3184652"/>
-            <a:ext cx="73152" cy="1310894"/>
-          </a:xfrm>
-          <a:prstGeom prst="rect">
-            <a:avLst/>
-          </a:prstGeom>
-          <a:solidFill>
-            <a:srgbClr val="24508F"/>
-          </a:solidFill>
-          <a:ln>
-            <a:noFill/>
-          </a:ln>
-          <a:effectLst/>
-        </p:spPr>
-        <p:style>
-          <a:lnRef idx="1">
-            <a:schemeClr val="accent1"/>
-          </a:lnRef>
-          <a:fillRef idx="3">
-            <a:schemeClr val="accent1"/>
-          </a:fillRef>
-          <a:effectRef idx="2">
-            <a:schemeClr val="accent1"/>
-          </a:effectRef>
-          <a:fontRef idx="minor">
-            <a:schemeClr val="lt1"/>
-          </a:fontRef>
-        </p:style>
-        <p:txBody>
-          <a:bodyPr rtlCol="0" anchor="ctr"/>
-          <a:lstStyle/>
-          <a:p>
-            <a:pPr algn="ctr"/>
-          </a:p>
-        </p:txBody>
-      </p:sp>
-      <p:sp>
-        <p:nvSpPr>
-          <p:cNvPr id="47" name="TextBox 46"/>
-          <p:cNvSpPr txBox="1"/>
-          <p:nvPr/>
-        </p:nvSpPr>
-        <p:spPr>
-          <a:xfrm>
-            <a:off x="1005840" y="3349244"/>
-            <a:ext cx="4936991" cy="294004"/>
-          </a:xfrm>
-          <a:prstGeom prst="rect">
-            <a:avLst/>
-          </a:prstGeom>
-          <a:noFill/>
-        </p:spPr>
-        <p:txBody>
-          <a:bodyPr wrap="square" lIns="0" rIns="0" tIns="0" bIns="0" anchor="t">
-            <a:spAutoFit/>
-          </a:bodyPr>
-          <a:lstStyle/>
-          <a:p>
-            <a:pPr algn="l">
-              <a:lnSpc>
-                <a:spcPts val="1954"/>
-              </a:lnSpc>
-            </a:pPr>
-            <a:r>
-              <a:rPr sz="1700" b="1">
-                <a:solidFill>
-                  <a:srgbClr val="1B2A4A"/>
-                </a:solidFill>
-                <a:latin typeface="Georgia"/>
-              </a:rPr>
-              <a:t>Nafas yo‘lini ochish.</a:t>
-            </a:r>
-          </a:p>
-        </p:txBody>
-      </p:sp>
-      <p:sp>
-        <p:nvSpPr>
-          <p:cNvPr id="48" name="TextBox 47"/>
-          <p:cNvSpPr txBox="1"/>
-          <p:nvPr/>
-        </p:nvSpPr>
-        <p:spPr>
-          <a:xfrm>
-            <a:off x="1005840" y="3688968"/>
-            <a:ext cx="4936991" cy="508000"/>
-          </a:xfrm>
-          <a:prstGeom prst="rect">
-            <a:avLst/>
-          </a:prstGeom>
-          <a:noFill/>
-        </p:spPr>
-        <p:txBody>
-          <a:bodyPr wrap="square" lIns="0" rIns="0" tIns="0" bIns="0" anchor="t">
-            <a:spAutoFit/>
-          </a:bodyPr>
-          <a:lstStyle/>
-          <a:p>
-            <a:pPr algn="l">
-              <a:lnSpc>
-                <a:spcPts val="1820"/>
-              </a:lnSpc>
-            </a:pPr>
-            <a:r>
-              <a:rPr sz="1400" b="0">
-                <a:solidFill>
-                  <a:srgbClr val="3A4560"/>
-                </a:solidFill>
-                <a:latin typeface="Segoe UI"/>
-              </a:rPr>
-              <a:t>Bir qo‘lni peshonaga qo‘yib, boshni orqaga engashtiring,</a:t>
-            </a:r>
-            <a:br/>
-            <a:r>
-              <a:rPr sz="1400" b="0">
-                <a:solidFill>
-                  <a:srgbClr val="3A4560"/>
-                </a:solidFill>
-                <a:latin typeface="Segoe UI"/>
-              </a:rPr>
-              <a:t>ikkinchi qo‘l barmoqlari bilan iyakni ko‘taring.</a:t>
-            </a:r>
-          </a:p>
-        </p:txBody>
-      </p:sp>
-      <p:sp>
-        <p:nvSpPr>
-          <p:cNvPr id="49" name="Rounded Rectangle 48"/>
-          <p:cNvSpPr/>
-          <p:nvPr/>
-        </p:nvSpPr>
-        <p:spPr>
-          <a:xfrm>
-            <a:off x="6255867" y="3184652"/>
-            <a:ext cx="5204307" cy="1310894"/>
-          </a:xfrm>
-          <a:prstGeom prst="roundRect">
-            <a:avLst>
-              <a:gd name="adj" fmla="val 5580"/>
-            </a:avLst>
-          </a:prstGeom>
-          <a:solidFill>
-            <a:srgbClr val="FBF6EC"/>
-          </a:solidFill>
-          <a:ln w="12700">
-            <a:solidFill>
-              <a:srgbClr val="D8C8AE"/>
-            </a:solidFill>
-          </a:ln>
-          <a:effectLst/>
-        </p:spPr>
-        <p:style>
-          <a:lnRef idx="1">
-            <a:schemeClr val="accent1"/>
-          </a:lnRef>
-          <a:fillRef idx="3">
-            <a:schemeClr val="accent1"/>
-          </a:fillRef>
-          <a:effectRef idx="2">
-            <a:schemeClr val="accent1"/>
-          </a:effectRef>
-          <a:fontRef idx="minor">
-            <a:schemeClr val="lt1"/>
-          </a:fontRef>
-        </p:style>
-        <p:txBody>
-          <a:bodyPr rtlCol="0" anchor="ctr"/>
-          <a:lstStyle/>
-          <a:p>
-            <a:pPr algn="ctr"/>
-          </a:p>
-        </p:txBody>
-      </p:sp>
-      <p:sp>
-        <p:nvSpPr>
-          <p:cNvPr id="50" name="Rectangle 49"/>
-          <p:cNvSpPr/>
-          <p:nvPr/>
-        </p:nvSpPr>
-        <p:spPr>
-          <a:xfrm>
-            <a:off x="6255867" y="3184652"/>
-            <a:ext cx="73152" cy="1310894"/>
-          </a:xfrm>
-          <a:prstGeom prst="rect">
-            <a:avLst/>
-          </a:prstGeom>
-          <a:solidFill>
-            <a:srgbClr val="24508F"/>
-          </a:solidFill>
-          <a:ln>
-            <a:noFill/>
-          </a:ln>
-          <a:effectLst/>
-        </p:spPr>
-        <p:style>
-          <a:lnRef idx="1">
-            <a:schemeClr val="accent1"/>
-          </a:lnRef>
-          <a:fillRef idx="3">
-            <a:schemeClr val="accent1"/>
-          </a:fillRef>
-          <a:effectRef idx="2">
-            <a:schemeClr val="accent1"/>
-          </a:effectRef>
-          <a:fontRef idx="minor">
-            <a:schemeClr val="lt1"/>
-          </a:fontRef>
-        </p:style>
-        <p:txBody>
-          <a:bodyPr rtlCol="0" anchor="ctr"/>
-          <a:lstStyle/>
-          <a:p>
-            <a:pPr algn="ctr"/>
-          </a:p>
-        </p:txBody>
-      </p:sp>
-      <p:sp>
-        <p:nvSpPr>
-          <p:cNvPr id="51" name="TextBox 50"/>
-          <p:cNvSpPr txBox="1"/>
-          <p:nvPr/>
-        </p:nvSpPr>
-        <p:spPr>
-          <a:xfrm>
-            <a:off x="6530187" y="3349244"/>
-            <a:ext cx="4936991" cy="294004"/>
-          </a:xfrm>
-          <a:prstGeom prst="rect">
-            <a:avLst/>
-          </a:prstGeom>
-          <a:noFill/>
-        </p:spPr>
-        <p:txBody>
-          <a:bodyPr wrap="square" lIns="0" rIns="0" tIns="0" bIns="0" anchor="t">
-            <a:spAutoFit/>
-          </a:bodyPr>
-          <a:lstStyle/>
-          <a:p>
-            <a:pPr algn="l">
-              <a:lnSpc>
-                <a:spcPts val="1954"/>
-              </a:lnSpc>
-            </a:pPr>
-            <a:r>
-              <a:rPr sz="1700" b="1">
-                <a:solidFill>
-                  <a:srgbClr val="1B2A4A"/>
-                </a:solidFill>
-                <a:latin typeface="Georgia"/>
-              </a:rPr>
-              <a:t>Nafasni tekshirish.</a:t>
-            </a:r>
-          </a:p>
-        </p:txBody>
-      </p:sp>
-      <p:sp>
-        <p:nvSpPr>
-          <p:cNvPr id="52" name="TextBox 51"/>
-          <p:cNvSpPr txBox="1"/>
-          <p:nvPr/>
-        </p:nvSpPr>
-        <p:spPr>
-          <a:xfrm>
-            <a:off x="6530187" y="3688968"/>
-            <a:ext cx="4936991" cy="739140"/>
-          </a:xfrm>
-          <a:prstGeom prst="rect">
-            <a:avLst/>
-          </a:prstGeom>
-          <a:noFill/>
-        </p:spPr>
-        <p:txBody>
-          <a:bodyPr wrap="square" lIns="0" rIns="0" tIns="0" bIns="0" anchor="t">
-            <a:spAutoFit/>
-          </a:bodyPr>
-          <a:lstStyle/>
-          <a:p>
-            <a:pPr algn="l">
-              <a:lnSpc>
-                <a:spcPts val="1820"/>
-              </a:lnSpc>
-            </a:pPr>
-            <a:r>
-              <a:rPr sz="1400" b="0">
-                <a:solidFill>
-                  <a:srgbClr val="3A4560"/>
-                </a:solidFill>
-                <a:latin typeface="Segoe UI"/>
-              </a:rPr>
-              <a:t>10 soniya davomida «Ko‘r, eshit, his qil»: ko‘krak qafasi</a:t>
-            </a:r>
-            <a:br/>
-            <a:r>
-              <a:rPr sz="1400" b="0">
-                <a:solidFill>
-                  <a:srgbClr val="3A4560"/>
-                </a:solidFill>
-                <a:latin typeface="Segoe UI"/>
-              </a:rPr>
-              <a:t>harakatini ko‘ring, nafas tovushini eshiting, yuzingiz bilan</a:t>
-            </a:r>
-            <a:br/>
-            <a:r>
-              <a:rPr sz="1400" b="0">
-                <a:solidFill>
-                  <a:srgbClr val="3A4560"/>
-                </a:solidFill>
-                <a:latin typeface="Segoe UI"/>
-              </a:rPr>
-              <a:t>havo oqimini his qiling.</a:t>
-            </a:r>
-          </a:p>
-        </p:txBody>
-      </p:sp>
-      <p:sp>
-        <p:nvSpPr>
-          <p:cNvPr id="53" name="Rounded Rectangle 52"/>
-          <p:cNvSpPr/>
-          <p:nvPr/>
-        </p:nvSpPr>
-        <p:spPr>
-          <a:xfrm>
-            <a:off x="731520" y="4724146"/>
-            <a:ext cx="5204307" cy="1310894"/>
-          </a:xfrm>
-          <a:prstGeom prst="roundRect">
-            <a:avLst>
-              <a:gd name="adj" fmla="val 5580"/>
-            </a:avLst>
-          </a:prstGeom>
-          <a:solidFill>
-            <a:srgbClr val="FBF6EC"/>
-          </a:solidFill>
-          <a:ln w="12700">
-            <a:solidFill>
-              <a:srgbClr val="D8C8AE"/>
-            </a:solidFill>
-          </a:ln>
-          <a:effectLst/>
-        </p:spPr>
-        <p:style>
-          <a:lnRef idx="1">
-            <a:schemeClr val="accent1"/>
-          </a:lnRef>
-          <a:fillRef idx="3">
-            <a:schemeClr val="accent1"/>
-          </a:fillRef>
-          <a:effectRef idx="2">
-            <a:schemeClr val="accent1"/>
-          </a:effectRef>
-          <a:fontRef idx="minor">
-            <a:schemeClr val="lt1"/>
-          </a:fontRef>
-        </p:style>
-        <p:txBody>
-          <a:bodyPr rtlCol="0" anchor="ctr"/>
-          <a:lstStyle/>
-          <a:p>
-            <a:pPr algn="ctr"/>
-          </a:p>
-        </p:txBody>
-      </p:sp>
-      <p:sp>
-        <p:nvSpPr>
-          <p:cNvPr id="54" name="Rectangle 53"/>
-          <p:cNvSpPr/>
-          <p:nvPr/>
-        </p:nvSpPr>
-        <p:spPr>
-          <a:xfrm>
-            <a:off x="731520" y="4724146"/>
-            <a:ext cx="73152" cy="1310894"/>
-          </a:xfrm>
-          <a:prstGeom prst="rect">
-            <a:avLst/>
-          </a:prstGeom>
-          <a:solidFill>
-            <a:srgbClr val="24508F"/>
-          </a:solidFill>
-          <a:ln>
-            <a:noFill/>
-          </a:ln>
-          <a:effectLst/>
-        </p:spPr>
-        <p:style>
-          <a:lnRef idx="1">
-            <a:schemeClr val="accent1"/>
-          </a:lnRef>
-          <a:fillRef idx="3">
-            <a:schemeClr val="accent1"/>
-          </a:fillRef>
-          <a:effectRef idx="2">
-            <a:schemeClr val="accent1"/>
-          </a:effectRef>
-          <a:fontRef idx="minor">
-            <a:schemeClr val="lt1"/>
-          </a:fontRef>
-        </p:style>
-        <p:txBody>
-          <a:bodyPr rtlCol="0" anchor="ctr"/>
-          <a:lstStyle/>
-          <a:p>
-            <a:pPr algn="ctr"/>
-          </a:p>
-        </p:txBody>
-      </p:sp>
-      <p:sp>
-        <p:nvSpPr>
-          <p:cNvPr id="55" name="TextBox 54"/>
-          <p:cNvSpPr txBox="1"/>
-          <p:nvPr/>
-        </p:nvSpPr>
-        <p:spPr>
-          <a:xfrm>
-            <a:off x="1005840" y="4888738"/>
             <a:ext cx="4936991" cy="352424"/>
           </a:xfrm>
           <a:prstGeom prst="rect">
@@ -11088,13 +10538,13 @@
       </p:sp>
       <p:sp>
         <p:nvSpPr>
-          <p:cNvPr id="56" name="TextBox 55"/>
+          <p:cNvPr id="44" name="TextBox 43"/>
           <p:cNvSpPr txBox="1"/>
           <p:nvPr/>
         </p:nvSpPr>
         <p:spPr>
           <a:xfrm>
-            <a:off x="1005840" y="5286882"/>
+            <a:off x="6530187" y="2207895"/>
             <a:ext cx="4936991" cy="640080"/>
           </a:xfrm>
           <a:prstGeom prst="rect">
@@ -11120,7 +10570,7 @@
                 </a:solidFill>
                 <a:latin typeface="Segoe UI"/>
               </a:rPr>
-              <a:t>— vaqtni yo‘qotmaslik, lekin shoshqaloqlik</a:t>
+              <a:t>Vaqtni yo‘qotmaslik, lekin shoshqaloqlik</a:t>
             </a:r>
             <a:br/>
             <a:r>
@@ -11137,13 +10587,13 @@
       </p:sp>
       <p:sp>
         <p:nvSpPr>
-          <p:cNvPr id="57" name="Rounded Rectangle 56"/>
+          <p:cNvPr id="45" name="Rounded Rectangle 44"/>
           <p:cNvSpPr/>
           <p:nvPr/>
         </p:nvSpPr>
         <p:spPr>
           <a:xfrm>
-            <a:off x="6255867" y="4724146"/>
+            <a:off x="731520" y="3184652"/>
             <a:ext cx="5204307" cy="1310894"/>
           </a:xfrm>
           <a:prstGeom prst="roundRect">
@@ -11185,13 +10635,13 @@
       </p:sp>
       <p:sp>
         <p:nvSpPr>
-          <p:cNvPr id="58" name="Rectangle 57"/>
+          <p:cNvPr id="46" name="Rectangle 45"/>
           <p:cNvSpPr/>
           <p:nvPr/>
         </p:nvSpPr>
         <p:spPr>
           <a:xfrm>
-            <a:off x="6255867" y="4724146"/>
+            <a:off x="731520" y="3184652"/>
             <a:ext cx="73152" cy="1310894"/>
           </a:xfrm>
           <a:prstGeom prst="rect">
@@ -11229,13 +10679,13 @@
       </p:sp>
       <p:sp>
         <p:nvSpPr>
-          <p:cNvPr id="59" name="TextBox 58"/>
+          <p:cNvPr id="47" name="TextBox 46"/>
           <p:cNvSpPr txBox="1"/>
           <p:nvPr/>
         </p:nvSpPr>
         <p:spPr>
           <a:xfrm>
-            <a:off x="6530187" y="4888738"/>
+            <a:off x="1005840" y="3349244"/>
             <a:ext cx="4936991" cy="352424"/>
           </a:xfrm>
           <a:prstGeom prst="rect">
@@ -11261,20 +10711,20 @@
                 </a:solidFill>
                 <a:latin typeface="Georgia"/>
               </a:rPr>
-              <a:t>Xavfni baholash.</a:t>
+              <a:t>Xavfsizlik</a:t>
             </a:r>
           </a:p>
         </p:txBody>
       </p:sp>
       <p:sp>
         <p:nvSpPr>
-          <p:cNvPr id="60" name="TextBox 59"/>
+          <p:cNvPr id="48" name="TextBox 47"/>
           <p:cNvSpPr txBox="1"/>
           <p:nvPr/>
         </p:nvSpPr>
         <p:spPr>
           <a:xfrm>
-            <a:off x="6530187" y="5286882"/>
+            <a:off x="1005840" y="3747389"/>
             <a:ext cx="4936991" cy="640080"/>
           </a:xfrm>
           <a:prstGeom prst="rect">
@@ -11300,7 +10750,7 @@
                 </a:solidFill>
                 <a:latin typeface="Segoe UI"/>
               </a:rPr>
-              <a:t>Atrofga qarang: tok, olov, gaz, yiqilishi</a:t>
+              <a:t>Yordam beruvchi avval o‘z xavfsizligini</a:t>
             </a:r>
             <a:br/>
             <a:r>
@@ -11310,7 +10760,367 @@
                 </a:solidFill>
                 <a:latin typeface="Segoe UI"/>
               </a:rPr>
-              <a:t>mumkin bo‘lgan buyumlar bormi?</a:t>
+              <a:t>ta’minlaydi.</a:t>
+            </a:r>
+          </a:p>
+        </p:txBody>
+      </p:sp>
+      <p:sp>
+        <p:nvSpPr>
+          <p:cNvPr id="49" name="Rounded Rectangle 48"/>
+          <p:cNvSpPr/>
+          <p:nvPr/>
+        </p:nvSpPr>
+        <p:spPr>
+          <a:xfrm>
+            <a:off x="6255867" y="3184652"/>
+            <a:ext cx="5204307" cy="1310894"/>
+          </a:xfrm>
+          <a:prstGeom prst="roundRect">
+            <a:avLst>
+              <a:gd name="adj" fmla="val 5580"/>
+            </a:avLst>
+          </a:prstGeom>
+          <a:solidFill>
+            <a:srgbClr val="FBF6EC"/>
+          </a:solidFill>
+          <a:ln w="12700">
+            <a:solidFill>
+              <a:srgbClr val="D8C8AE"/>
+            </a:solidFill>
+          </a:ln>
+          <a:effectLst/>
+        </p:spPr>
+        <p:style>
+          <a:lnRef idx="1">
+            <a:schemeClr val="accent1"/>
+          </a:lnRef>
+          <a:fillRef idx="3">
+            <a:schemeClr val="accent1"/>
+          </a:fillRef>
+          <a:effectRef idx="2">
+            <a:schemeClr val="accent1"/>
+          </a:effectRef>
+          <a:fontRef idx="minor">
+            <a:schemeClr val="lt1"/>
+          </a:fontRef>
+        </p:style>
+        <p:txBody>
+          <a:bodyPr rtlCol="0" anchor="ctr"/>
+          <a:lstStyle/>
+          <a:p>
+            <a:pPr algn="ctr"/>
+          </a:p>
+        </p:txBody>
+      </p:sp>
+      <p:sp>
+        <p:nvSpPr>
+          <p:cNvPr id="50" name="Rectangle 49"/>
+          <p:cNvSpPr/>
+          <p:nvPr/>
+        </p:nvSpPr>
+        <p:spPr>
+          <a:xfrm>
+            <a:off x="6255867" y="3184652"/>
+            <a:ext cx="73152" cy="1310894"/>
+          </a:xfrm>
+          <a:prstGeom prst="rect">
+            <a:avLst/>
+          </a:prstGeom>
+          <a:solidFill>
+            <a:srgbClr val="24508F"/>
+          </a:solidFill>
+          <a:ln>
+            <a:noFill/>
+          </a:ln>
+          <a:effectLst/>
+        </p:spPr>
+        <p:style>
+          <a:lnRef idx="1">
+            <a:schemeClr val="accent1"/>
+          </a:lnRef>
+          <a:fillRef idx="3">
+            <a:schemeClr val="accent1"/>
+          </a:fillRef>
+          <a:effectRef idx="2">
+            <a:schemeClr val="accent1"/>
+          </a:effectRef>
+          <a:fontRef idx="minor">
+            <a:schemeClr val="lt1"/>
+          </a:fontRef>
+        </p:style>
+        <p:txBody>
+          <a:bodyPr rtlCol="0" anchor="ctr"/>
+          <a:lstStyle/>
+          <a:p>
+            <a:pPr algn="ctr"/>
+          </a:p>
+        </p:txBody>
+      </p:sp>
+      <p:sp>
+        <p:nvSpPr>
+          <p:cNvPr id="51" name="TextBox 50"/>
+          <p:cNvSpPr txBox="1"/>
+          <p:nvPr/>
+        </p:nvSpPr>
+        <p:spPr>
+          <a:xfrm>
+            <a:off x="6530187" y="3349244"/>
+            <a:ext cx="4936991" cy="352424"/>
+          </a:xfrm>
+          <a:prstGeom prst="rect">
+            <a:avLst/>
+          </a:prstGeom>
+          <a:noFill/>
+        </p:spPr>
+        <p:txBody>
+          <a:bodyPr wrap="square" lIns="0" rIns="0" tIns="0" bIns="0" anchor="t">
+            <a:spAutoFit/>
+          </a:bodyPr>
+          <a:lstStyle/>
+          <a:p>
+            <a:pPr algn="l">
+              <a:lnSpc>
+                <a:spcPts val="2415"/>
+              </a:lnSpc>
+            </a:pPr>
+            <a:r>
+              <a:rPr sz="2100" b="1">
+                <a:solidFill>
+                  <a:srgbClr val="1B2A4A"/>
+                </a:solidFill>
+                <a:latin typeface="Georgia"/>
+              </a:rPr>
+              <a:t>Xotirjamlik</a:t>
+            </a:r>
+          </a:p>
+        </p:txBody>
+      </p:sp>
+      <p:sp>
+        <p:nvSpPr>
+          <p:cNvPr id="52" name="TextBox 51"/>
+          <p:cNvSpPr txBox="1"/>
+          <p:nvPr/>
+        </p:nvSpPr>
+        <p:spPr>
+          <a:xfrm>
+            <a:off x="6530187" y="3747389"/>
+            <a:ext cx="4936991" cy="640080"/>
+          </a:xfrm>
+          <a:prstGeom prst="rect">
+            <a:avLst/>
+          </a:prstGeom>
+          <a:noFill/>
+        </p:spPr>
+        <p:txBody>
+          <a:bodyPr wrap="square" lIns="0" rIns="0" tIns="0" bIns="0" anchor="t">
+            <a:spAutoFit/>
+          </a:bodyPr>
+          <a:lstStyle/>
+          <a:p>
+            <a:pPr algn="l">
+              <a:lnSpc>
+                <a:spcPts val="2340"/>
+              </a:lnSpc>
+            </a:pPr>
+            <a:r>
+              <a:rPr sz="1800" b="0">
+                <a:solidFill>
+                  <a:srgbClr val="3A4560"/>
+                </a:solidFill>
+                <a:latin typeface="Segoe UI"/>
+              </a:rPr>
+              <a:t>Jabrlanuvchini tinchlantirish, vahimani bartaraf</a:t>
+            </a:r>
+            <a:br/>
+            <a:r>
+              <a:rPr sz="1800" b="0">
+                <a:solidFill>
+                  <a:srgbClr val="3A4560"/>
+                </a:solidFill>
+                <a:latin typeface="Segoe UI"/>
+              </a:rPr>
+              <a:t>etish.</a:t>
+            </a:r>
+          </a:p>
+        </p:txBody>
+      </p:sp>
+      <p:sp>
+        <p:nvSpPr>
+          <p:cNvPr id="53" name="Rounded Rectangle 52"/>
+          <p:cNvSpPr/>
+          <p:nvPr/>
+        </p:nvSpPr>
+        <p:spPr>
+          <a:xfrm>
+            <a:off x="731520" y="4724146"/>
+            <a:ext cx="5204307" cy="1310894"/>
+          </a:xfrm>
+          <a:prstGeom prst="roundRect">
+            <a:avLst>
+              <a:gd name="adj" fmla="val 5580"/>
+            </a:avLst>
+          </a:prstGeom>
+          <a:solidFill>
+            <a:srgbClr val="FBF6EC"/>
+          </a:solidFill>
+          <a:ln w="12700">
+            <a:solidFill>
+              <a:srgbClr val="D8C8AE"/>
+            </a:solidFill>
+          </a:ln>
+          <a:effectLst/>
+        </p:spPr>
+        <p:style>
+          <a:lnRef idx="1">
+            <a:schemeClr val="accent1"/>
+          </a:lnRef>
+          <a:fillRef idx="3">
+            <a:schemeClr val="accent1"/>
+          </a:fillRef>
+          <a:effectRef idx="2">
+            <a:schemeClr val="accent1"/>
+          </a:effectRef>
+          <a:fontRef idx="minor">
+            <a:schemeClr val="lt1"/>
+          </a:fontRef>
+        </p:style>
+        <p:txBody>
+          <a:bodyPr rtlCol="0" anchor="ctr"/>
+          <a:lstStyle/>
+          <a:p>
+            <a:pPr algn="ctr"/>
+          </a:p>
+        </p:txBody>
+      </p:sp>
+      <p:sp>
+        <p:nvSpPr>
+          <p:cNvPr id="54" name="Rectangle 53"/>
+          <p:cNvSpPr/>
+          <p:nvPr/>
+        </p:nvSpPr>
+        <p:spPr>
+          <a:xfrm>
+            <a:off x="731520" y="4724146"/>
+            <a:ext cx="73152" cy="1310894"/>
+          </a:xfrm>
+          <a:prstGeom prst="rect">
+            <a:avLst/>
+          </a:prstGeom>
+          <a:solidFill>
+            <a:srgbClr val="24508F"/>
+          </a:solidFill>
+          <a:ln>
+            <a:noFill/>
+          </a:ln>
+          <a:effectLst/>
+        </p:spPr>
+        <p:style>
+          <a:lnRef idx="1">
+            <a:schemeClr val="accent1"/>
+          </a:lnRef>
+          <a:fillRef idx="3">
+            <a:schemeClr val="accent1"/>
+          </a:fillRef>
+          <a:effectRef idx="2">
+            <a:schemeClr val="accent1"/>
+          </a:effectRef>
+          <a:fontRef idx="minor">
+            <a:schemeClr val="lt1"/>
+          </a:fontRef>
+        </p:style>
+        <p:txBody>
+          <a:bodyPr rtlCol="0" anchor="ctr"/>
+          <a:lstStyle/>
+          <a:p>
+            <a:pPr algn="ctr"/>
+          </a:p>
+        </p:txBody>
+      </p:sp>
+      <p:sp>
+        <p:nvSpPr>
+          <p:cNvPr id="55" name="TextBox 54"/>
+          <p:cNvSpPr txBox="1"/>
+          <p:nvPr/>
+        </p:nvSpPr>
+        <p:spPr>
+          <a:xfrm>
+            <a:off x="1005840" y="4888738"/>
+            <a:ext cx="4936991" cy="352424"/>
+          </a:xfrm>
+          <a:prstGeom prst="rect">
+            <a:avLst/>
+          </a:prstGeom>
+          <a:noFill/>
+        </p:spPr>
+        <p:txBody>
+          <a:bodyPr wrap="square" lIns="0" rIns="0" tIns="0" bIns="0" anchor="t">
+            <a:spAutoFit/>
+          </a:bodyPr>
+          <a:lstStyle/>
+          <a:p>
+            <a:pPr algn="l">
+              <a:lnSpc>
+                <a:spcPts val="2415"/>
+              </a:lnSpc>
+            </a:pPr>
+            <a:r>
+              <a:rPr sz="2100" b="1">
+                <a:solidFill>
+                  <a:srgbClr val="1B2A4A"/>
+                </a:solidFill>
+                <a:latin typeface="Georgia"/>
+              </a:rPr>
+              <a:t>«Zarar yetkazma»</a:t>
+            </a:r>
+          </a:p>
+        </p:txBody>
+      </p:sp>
+      <p:sp>
+        <p:nvSpPr>
+          <p:cNvPr id="56" name="TextBox 55"/>
+          <p:cNvSpPr txBox="1"/>
+          <p:nvPr/>
+        </p:nvSpPr>
+        <p:spPr>
+          <a:xfrm>
+            <a:off x="1005840" y="5286882"/>
+            <a:ext cx="4936991" cy="640080"/>
+          </a:xfrm>
+          <a:prstGeom prst="rect">
+            <a:avLst/>
+          </a:prstGeom>
+          <a:noFill/>
+        </p:spPr>
+        <p:txBody>
+          <a:bodyPr wrap="square" lIns="0" rIns="0" tIns="0" bIns="0" anchor="t">
+            <a:spAutoFit/>
+          </a:bodyPr>
+          <a:lstStyle/>
+          <a:p>
+            <a:pPr algn="l">
+              <a:lnSpc>
+                <a:spcPts val="2340"/>
+              </a:lnSpc>
+            </a:pPr>
+            <a:r>
+              <a:rPr sz="1800" b="0">
+                <a:solidFill>
+                  <a:srgbClr val="3A4560"/>
+                </a:solidFill>
+                <a:latin typeface="Segoe UI"/>
+              </a:rPr>
+              <a:t>Bilmagan, ishonch komil bo‘lmagan harakatni</a:t>
+            </a:r>
+            <a:br/>
+            <a:r>
+              <a:rPr sz="1800" b="0">
+                <a:solidFill>
+                  <a:srgbClr val="3A4560"/>
+                </a:solidFill>
+                <a:latin typeface="Segoe UI"/>
+              </a:rPr>
+              <a:t>qilmaslik.</a:t>
             </a:r>
           </a:p>
         </p:txBody>
